--- a/JAVA PROJECT NEW.pptx
+++ b/JAVA PROJECT NEW.pptx
@@ -19,8 +19,8 @@
     <p:sldId id="265" r:id="rId10"/>
     <p:sldId id="266" r:id="rId11"/>
     <p:sldId id="267" r:id="rId12"/>
-    <p:sldId id="268" r:id="rId13"/>
-    <p:sldId id="262" r:id="rId14"/>
+    <p:sldId id="262" r:id="rId13"/>
+    <p:sldId id="268" r:id="rId14"/>
   </p:sldIdLst>
   <p:sldSz cx="12192000" cy="6858000"/>
   <p:notesSz cx="6858000" cy="9144000"/>
@@ -4753,10 +4753,43 @@
       </p:grpSpPr>
       <p:sp>
         <p:nvSpPr>
-          <p:cNvPr id="2" name="Date Placeholder 1">
-            <a:extLst>
-              <a:ext uri="{FF2B5EF4-FFF2-40B4-BE49-F238E27FC236}">
-                <a16:creationId xmlns:a16="http://schemas.microsoft.com/office/drawing/2014/main" id="{D6DCF6F7-67DF-EC6B-06FA-0CE92CF332DD}"/>
+          <p:cNvPr id="2" name="Title 1">
+            <a:extLst>
+              <a:ext uri="{FF2B5EF4-FFF2-40B4-BE49-F238E27FC236}">
+                <a16:creationId xmlns:a16="http://schemas.microsoft.com/office/drawing/2014/main" id="{BDCEF2EB-DC8E-A39F-8C45-4CB81854799A}"/>
+              </a:ext>
+            </a:extLst>
+          </p:cNvPr>
+          <p:cNvSpPr>
+            <a:spLocks noGrp="1"/>
+          </p:cNvSpPr>
+          <p:nvPr>
+            <p:ph type="title"/>
+          </p:nvPr>
+        </p:nvSpPr>
+        <p:spPr>
+          <a:xfrm>
+            <a:off x="838200" y="659697"/>
+            <a:ext cx="10515600" cy="892548"/>
+          </a:xfrm>
+        </p:spPr>
+        <p:txBody>
+          <a:bodyPr/>
+          <a:lstStyle/>
+          <a:p>
+            <a:r>
+              <a:rPr lang="en-IN" dirty="0"/>
+              <a:t>Geo Tag Photo-</a:t>
+            </a:r>
+          </a:p>
+        </p:txBody>
+      </p:sp>
+      <p:sp>
+        <p:nvSpPr>
+          <p:cNvPr id="4" name="Date Placeholder 3">
+            <a:extLst>
+              <a:ext uri="{FF2B5EF4-FFF2-40B4-BE49-F238E27FC236}">
+                <a16:creationId xmlns:a16="http://schemas.microsoft.com/office/drawing/2014/main" id="{48D4BAD5-7EFF-4B1E-4929-B42B4691DD0D}"/>
               </a:ext>
             </a:extLst>
           </p:cNvPr>
@@ -4772,7 +4805,7 @@
           <a:bodyPr/>
           <a:lstStyle/>
           <a:p>
-            <a:fld id="{2FD85D5E-B9E5-4C7E-88B1-43A66A7C3488}" type="datetime1">
+            <a:fld id="{C1514C08-598A-44BF-A4B1-00F35979A9B0}" type="datetime1">
               <a:rPr lang="en-IN" smtClean="0"/>
               <a:t>16-10-2026</a:t>
             </a:fld>
@@ -4782,10 +4815,10 @@
       </p:sp>
       <p:sp>
         <p:nvSpPr>
-          <p:cNvPr id="3" name="Slide Number Placeholder 2">
-            <a:extLst>
-              <a:ext uri="{FF2B5EF4-FFF2-40B4-BE49-F238E27FC236}">
-                <a16:creationId xmlns:a16="http://schemas.microsoft.com/office/drawing/2014/main" id="{EB159933-00EF-A155-0CB6-F4D64AF29942}"/>
+          <p:cNvPr id="5" name="Slide Number Placeholder 4">
+            <a:extLst>
+              <a:ext uri="{FF2B5EF4-FFF2-40B4-BE49-F238E27FC236}">
+                <a16:creationId xmlns:a16="http://schemas.microsoft.com/office/drawing/2014/main" id="{793CFBAF-EF7C-CF04-7D6A-23B99B45B2CF}"/>
               </a:ext>
             </a:extLst>
           </p:cNvPr>
@@ -4809,12 +4842,84 @@
           </a:p>
         </p:txBody>
       </p:sp>
-      <p:sp>
-        <p:nvSpPr>
-          <p:cNvPr id="4" name="TextBox 3">
-            <a:extLst>
-              <a:ext uri="{FF2B5EF4-FFF2-40B4-BE49-F238E27FC236}">
-                <a16:creationId xmlns:a16="http://schemas.microsoft.com/office/drawing/2014/main" id="{AD7B4367-EA8B-8A27-355E-B803BCF806D0}"/>
+      <p:pic>
+        <p:nvPicPr>
+          <p:cNvPr id="10" name="Picture 9">
+            <a:extLst>
+              <a:ext uri="{FF2B5EF4-FFF2-40B4-BE49-F238E27FC236}">
+                <a16:creationId xmlns:a16="http://schemas.microsoft.com/office/drawing/2014/main" id="{224DB19A-831B-4419-9C61-4CABA242A9DE}"/>
+              </a:ext>
+            </a:extLst>
+          </p:cNvPr>
+          <p:cNvPicPr>
+            <a:picLocks noChangeAspect="1"/>
+          </p:cNvPicPr>
+          <p:nvPr/>
+        </p:nvPicPr>
+        <p:blipFill>
+          <a:blip r:embed="rId2">
+            <a:extLst>
+              <a:ext uri="{28A0092B-C50C-407E-A947-70E740481C1C}">
+                <a14:useLocalDpi xmlns:a14="http://schemas.microsoft.com/office/drawing/2010/main" val="0"/>
+              </a:ext>
+            </a:extLst>
+          </a:blip>
+          <a:stretch>
+            <a:fillRect/>
+          </a:stretch>
+        </p:blipFill>
+        <p:spPr>
+          <a:xfrm>
+            <a:off x="1101970" y="1690688"/>
+            <a:ext cx="4665785" cy="3191118"/>
+          </a:xfrm>
+          <a:prstGeom prst="rect">
+            <a:avLst/>
+          </a:prstGeom>
+        </p:spPr>
+      </p:pic>
+      <p:pic>
+        <p:nvPicPr>
+          <p:cNvPr id="12" name="Picture 11">
+            <a:extLst>
+              <a:ext uri="{FF2B5EF4-FFF2-40B4-BE49-F238E27FC236}">
+                <a16:creationId xmlns:a16="http://schemas.microsoft.com/office/drawing/2014/main" id="{0F8A150C-BAE1-4260-BA14-FF76CEFA5663}"/>
+              </a:ext>
+            </a:extLst>
+          </p:cNvPr>
+          <p:cNvPicPr>
+            <a:picLocks noChangeAspect="1"/>
+          </p:cNvPicPr>
+          <p:nvPr/>
+        </p:nvPicPr>
+        <p:blipFill>
+          <a:blip r:embed="rId3">
+            <a:extLst>
+              <a:ext uri="{28A0092B-C50C-407E-A947-70E740481C1C}">
+                <a14:useLocalDpi xmlns:a14="http://schemas.microsoft.com/office/drawing/2010/main" val="0"/>
+              </a:ext>
+            </a:extLst>
+          </a:blip>
+          <a:stretch>
+            <a:fillRect/>
+          </a:stretch>
+        </p:blipFill>
+        <p:spPr>
+          <a:xfrm>
+            <a:off x="7058172" y="1552245"/>
+            <a:ext cx="3534800" cy="3348428"/>
+          </a:xfrm>
+          <a:prstGeom prst="rect">
+            <a:avLst/>
+          </a:prstGeom>
+        </p:spPr>
+      </p:pic>
+      <p:sp>
+        <p:nvSpPr>
+          <p:cNvPr id="14" name="TextBox 13">
+            <a:extLst>
+              <a:ext uri="{FF2B5EF4-FFF2-40B4-BE49-F238E27FC236}">
+                <a16:creationId xmlns:a16="http://schemas.microsoft.com/office/drawing/2014/main" id="{0474610F-39F8-4DF2-8259-5F46668CAEF0}"/>
               </a:ext>
             </a:extLst>
           </p:cNvPr>
@@ -4823,8 +4928,8 @@
         </p:nvSpPr>
         <p:spPr>
           <a:xfrm>
-            <a:off x="3649132" y="2506133"/>
-            <a:ext cx="4751365" cy="1107996"/>
+            <a:off x="4118317" y="5554003"/>
+            <a:ext cx="8017412" cy="369332"/>
           </a:xfrm>
           <a:prstGeom prst="rect">
             <a:avLst/>
@@ -4832,23 +4937,59 @@
           <a:noFill/>
         </p:spPr>
         <p:txBody>
-          <a:bodyPr wrap="none" rtlCol="0">
+          <a:bodyPr wrap="square">
             <a:spAutoFit/>
           </a:bodyPr>
           <a:lstStyle/>
           <a:p>
             <a:r>
-              <a:rPr lang="en-US" sz="6600" b="1" dirty="0"/>
-              <a:t>THANK YOU</a:t>
-            </a:r>
-            <a:endParaRPr lang="en-IN" sz="6600" b="1" dirty="0"/>
+              <a:rPr lang="en-IN" dirty="0"/>
+              <a:t>https://github.com/deekshitha0897/Community-Library-Management-System</a:t>
+            </a:r>
+          </a:p>
+        </p:txBody>
+      </p:sp>
+      <p:sp>
+        <p:nvSpPr>
+          <p:cNvPr id="16" name="TextBox 15">
+            <a:extLst>
+              <a:ext uri="{FF2B5EF4-FFF2-40B4-BE49-F238E27FC236}">
+                <a16:creationId xmlns:a16="http://schemas.microsoft.com/office/drawing/2014/main" id="{62F37572-9F42-43E3-8343-E5C5561DB248}"/>
+              </a:ext>
+            </a:extLst>
+          </p:cNvPr>
+          <p:cNvSpPr txBox="1"/>
+          <p:nvPr/>
+        </p:nvSpPr>
+        <p:spPr>
+          <a:xfrm>
+            <a:off x="961292" y="5415503"/>
+            <a:ext cx="3157025" cy="646331"/>
+          </a:xfrm>
+          <a:prstGeom prst="rect">
+            <a:avLst/>
+          </a:prstGeom>
+          <a:noFill/>
+        </p:spPr>
+        <p:txBody>
+          <a:bodyPr wrap="square">
+            <a:spAutoFit/>
+          </a:bodyPr>
+          <a:lstStyle/>
+          <a:p>
+            <a:r>
+              <a:rPr lang="en-IN" sz="3600" dirty="0">
+                <a:latin typeface="Arial Rounded MT Bold" panose="020F0704030504030204" pitchFamily="34" charset="0"/>
+              </a:rPr>
+              <a:t>Git hub link -</a:t>
+            </a:r>
           </a:p>
         </p:txBody>
       </p:sp>
     </p:spTree>
     <p:extLst>
       <p:ext uri="{BB962C8B-B14F-4D97-AF65-F5344CB8AC3E}">
-        <p14:creationId xmlns:p14="http://schemas.microsoft.com/office/powerpoint/2010/main" val="283413923"/>
+        <p14:creationId xmlns:p14="http://schemas.microsoft.com/office/powerpoint/2010/main" val="1396777043"/>
       </p:ext>
     </p:extLst>
   </p:cSld>
@@ -4877,18 +5018,18 @@
       </p:grpSpPr>
       <p:sp>
         <p:nvSpPr>
-          <p:cNvPr id="2" name="Title 1">
-            <a:extLst>
-              <a:ext uri="{FF2B5EF4-FFF2-40B4-BE49-F238E27FC236}">
-                <a16:creationId xmlns:a16="http://schemas.microsoft.com/office/drawing/2014/main" id="{BDCEF2EB-DC8E-A39F-8C45-4CB81854799A}"/>
-              </a:ext>
-            </a:extLst>
-          </p:cNvPr>
-          <p:cNvSpPr>
-            <a:spLocks noGrp="1"/>
-          </p:cNvSpPr>
-          <p:nvPr>
-            <p:ph type="title"/>
+          <p:cNvPr id="2" name="Date Placeholder 1">
+            <a:extLst>
+              <a:ext uri="{FF2B5EF4-FFF2-40B4-BE49-F238E27FC236}">
+                <a16:creationId xmlns:a16="http://schemas.microsoft.com/office/drawing/2014/main" id="{D6DCF6F7-67DF-EC6B-06FA-0CE92CF332DD}"/>
+              </a:ext>
+            </a:extLst>
+          </p:cNvPr>
+          <p:cNvSpPr>
+            <a:spLocks noGrp="1"/>
+          </p:cNvSpPr>
+          <p:nvPr>
+            <p:ph type="dt" sz="half" idx="10"/>
           </p:nvPr>
         </p:nvSpPr>
         <p:spPr/>
@@ -4896,60 +5037,7 @@
           <a:bodyPr/>
           <a:lstStyle/>
           <a:p>
-            <a:r>
-              <a:rPr lang="en-IN" dirty="0"/>
-              <a:t>Geo Tag Photo and git hub link</a:t>
-            </a:r>
-          </a:p>
-        </p:txBody>
-      </p:sp>
-      <p:sp>
-        <p:nvSpPr>
-          <p:cNvPr id="3" name="Content Placeholder 2">
-            <a:extLst>
-              <a:ext uri="{FF2B5EF4-FFF2-40B4-BE49-F238E27FC236}">
-                <a16:creationId xmlns:a16="http://schemas.microsoft.com/office/drawing/2014/main" id="{764E026B-5FC7-651F-1236-75071A9D26C5}"/>
-              </a:ext>
-            </a:extLst>
-          </p:cNvPr>
-          <p:cNvSpPr>
-            <a:spLocks noGrp="1"/>
-          </p:cNvSpPr>
-          <p:nvPr>
-            <p:ph idx="1"/>
-          </p:nvPr>
-        </p:nvSpPr>
-        <p:spPr/>
-        <p:txBody>
-          <a:bodyPr/>
-          <a:lstStyle/>
-          <a:p>
-            <a:endParaRPr lang="en-IN" dirty="0"/>
-          </a:p>
-        </p:txBody>
-      </p:sp>
-      <p:sp>
-        <p:nvSpPr>
-          <p:cNvPr id="4" name="Date Placeholder 3">
-            <a:extLst>
-              <a:ext uri="{FF2B5EF4-FFF2-40B4-BE49-F238E27FC236}">
-                <a16:creationId xmlns:a16="http://schemas.microsoft.com/office/drawing/2014/main" id="{48D4BAD5-7EFF-4B1E-4929-B42B4691DD0D}"/>
-              </a:ext>
-            </a:extLst>
-          </p:cNvPr>
-          <p:cNvSpPr>
-            <a:spLocks noGrp="1"/>
-          </p:cNvSpPr>
-          <p:nvPr>
-            <p:ph type="dt" sz="half" idx="10"/>
-          </p:nvPr>
-        </p:nvSpPr>
-        <p:spPr/>
-        <p:txBody>
-          <a:bodyPr/>
-          <a:lstStyle/>
-          <a:p>
-            <a:fld id="{C1514C08-598A-44BF-A4B1-00F35979A9B0}" type="datetime1">
+            <a:fld id="{2FD85D5E-B9E5-4C7E-88B1-43A66A7C3488}" type="datetime1">
               <a:rPr lang="en-IN" smtClean="0"/>
               <a:t>16-10-2026</a:t>
             </a:fld>
@@ -4959,10 +5047,10 @@
       </p:sp>
       <p:sp>
         <p:nvSpPr>
-          <p:cNvPr id="5" name="Slide Number Placeholder 4">
-            <a:extLst>
-              <a:ext uri="{FF2B5EF4-FFF2-40B4-BE49-F238E27FC236}">
-                <a16:creationId xmlns:a16="http://schemas.microsoft.com/office/drawing/2014/main" id="{793CFBAF-EF7C-CF04-7D6A-23B99B45B2CF}"/>
+          <p:cNvPr id="3" name="Slide Number Placeholder 2">
+            <a:extLst>
+              <a:ext uri="{FF2B5EF4-FFF2-40B4-BE49-F238E27FC236}">
+                <a16:creationId xmlns:a16="http://schemas.microsoft.com/office/drawing/2014/main" id="{EB159933-00EF-A155-0CB6-F4D64AF29942}"/>
               </a:ext>
             </a:extLst>
           </p:cNvPr>
@@ -4986,10 +5074,46 @@
           </a:p>
         </p:txBody>
       </p:sp>
+      <p:sp>
+        <p:nvSpPr>
+          <p:cNvPr id="4" name="TextBox 3">
+            <a:extLst>
+              <a:ext uri="{FF2B5EF4-FFF2-40B4-BE49-F238E27FC236}">
+                <a16:creationId xmlns:a16="http://schemas.microsoft.com/office/drawing/2014/main" id="{AD7B4367-EA8B-8A27-355E-B803BCF806D0}"/>
+              </a:ext>
+            </a:extLst>
+          </p:cNvPr>
+          <p:cNvSpPr txBox="1"/>
+          <p:nvPr/>
+        </p:nvSpPr>
+        <p:spPr>
+          <a:xfrm>
+            <a:off x="3649132" y="2506133"/>
+            <a:ext cx="4751365" cy="1107996"/>
+          </a:xfrm>
+          <a:prstGeom prst="rect">
+            <a:avLst/>
+          </a:prstGeom>
+          <a:noFill/>
+        </p:spPr>
+        <p:txBody>
+          <a:bodyPr wrap="none" rtlCol="0">
+            <a:spAutoFit/>
+          </a:bodyPr>
+          <a:lstStyle/>
+          <a:p>
+            <a:r>
+              <a:rPr lang="en-US" sz="6600" b="1" dirty="0"/>
+              <a:t>THANK YOU</a:t>
+            </a:r>
+            <a:endParaRPr lang="en-IN" sz="6600" b="1" dirty="0"/>
+          </a:p>
+        </p:txBody>
+      </p:sp>
     </p:spTree>
     <p:extLst>
       <p:ext uri="{BB962C8B-B14F-4D97-AF65-F5344CB8AC3E}">
-        <p14:creationId xmlns:p14="http://schemas.microsoft.com/office/powerpoint/2010/main" val="1396777043"/>
+        <p14:creationId xmlns:p14="http://schemas.microsoft.com/office/powerpoint/2010/main" val="283413923"/>
       </p:ext>
     </p:extLst>
   </p:cSld>
